--- a/notes/HAML.WorkingGroup.2024.12.12.pptx
+++ b/notes/HAML.WorkingGroup.2024.12.12.pptx
@@ -8238,14 +8238,14 @@
           <p:nvPr>
             <p:extLst>
               <p:ext uri="{D42A27DB-BD31-4B8C-83A1-F6EECF244321}">
-                <p14:modId xmlns:p14="http://schemas.microsoft.com/office/powerpoint/2010/main" val="1448157800"/>
+                <p14:modId xmlns:p14="http://schemas.microsoft.com/office/powerpoint/2010/main" val="3983656449"/>
               </p:ext>
             </p:extLst>
           </p:nvPr>
         </p:nvGraphicFramePr>
         <p:xfrm>
           <a:off x="175512" y="617571"/>
-          <a:ext cx="8520600" cy="4018425"/>
+          <a:ext cx="8520600" cy="4309710"/>
         </p:xfrm>
         <a:graphic>
           <a:graphicData uri="http://schemas.openxmlformats.org/drawingml/2006/table">
@@ -8268,14 +8268,14 @@
                     </a:ext>
                   </a:extLst>
                 </a:gridCol>
-                <a:gridCol w="2413562">
+                <a:gridCol w="1326286">
                   <a:extLst>
                     <a:ext uri="{9D8B030D-6E8A-4147-A177-3AD203B41FA5}">
                       <a16:colId xmlns:a16="http://schemas.microsoft.com/office/drawing/2014/main" val="3880780543"/>
                     </a:ext>
                   </a:extLst>
                 </a:gridCol>
-                <a:gridCol w="1846738">
+                <a:gridCol w="2934014">
                   <a:extLst>
                     <a:ext uri="{9D8B030D-6E8A-4147-A177-3AD203B41FA5}">
                       <a16:colId xmlns:a16="http://schemas.microsoft.com/office/drawing/2014/main" val="3785388644"/>
@@ -8378,7 +8378,10 @@
                     <a:lstStyle/>
                     <a:p>
                       <a:pPr algn="ctr"/>
-                      <a:endParaRPr lang="en-NL" sz="800" dirty="0"/>
+                      <a:r>
+                        <a:rPr lang="en-NL" sz="800" dirty="0"/>
+                        <a:t>Before DASH 16</a:t>
+                      </a:r>
                     </a:p>
                   </a:txBody>
                   <a:tcPr/>
@@ -8435,7 +8438,10 @@
                     <a:lstStyle/>
                     <a:p>
                       <a:pPr algn="ctr"/>
-                      <a:endParaRPr lang="en-NL" sz="800" dirty="0"/>
+                      <a:r>
+                        <a:rPr lang="en-NL" sz="800" dirty="0"/>
+                        <a:t>January – pre DASH</a:t>
+                      </a:r>
                     </a:p>
                   </a:txBody>
                   <a:tcPr/>
@@ -8445,8 +8451,29 @@
                     <a:bodyPr/>
                     <a:lstStyle/>
                     <a:p>
-                      <a:pPr algn="ctr"/>
-                      <a:endParaRPr lang="en-NL" sz="800"/>
+                      <a:pPr marL="0" marR="0" lvl="0" indent="0" algn="ctr" defTabSz="914400" rtl="0" eaLnBrk="1" fontAlgn="auto" latinLnBrk="0" hangingPunct="1">
+                        <a:lnSpc>
+                          <a:spcPct val="100000"/>
+                        </a:lnSpc>
+                        <a:spcBef>
+                          <a:spcPts val="0"/>
+                        </a:spcBef>
+                        <a:spcAft>
+                          <a:spcPts val="0"/>
+                        </a:spcAft>
+                        <a:buClr>
+                          <a:srgbClr val="000000"/>
+                        </a:buClr>
+                        <a:buSzTx/>
+                        <a:buFont typeface="Arial"/>
+                        <a:buNone/>
+                        <a:tabLst/>
+                        <a:defRPr/>
+                      </a:pPr>
+                      <a:r>
+                        <a:rPr lang="en-NL" sz="800" dirty="0"/>
+                        <a:t>Eric &amp; Ben</a:t>
+                      </a:r>
                     </a:p>
                   </a:txBody>
                   <a:tcPr/>
@@ -8507,7 +8534,10 @@
                     <a:lstStyle/>
                     <a:p>
                       <a:pPr algn="ctr"/>
-                      <a:endParaRPr lang="en-NL" sz="800" dirty="0"/>
+                      <a:r>
+                        <a:rPr lang="en-NL" sz="800" dirty="0"/>
+                        <a:t>January – pre DASH</a:t>
+                      </a:r>
                     </a:p>
                   </a:txBody>
                   <a:tcPr/>
@@ -8520,7 +8550,7 @@
                       <a:pPr algn="ctr"/>
                       <a:r>
                         <a:rPr lang="en-NL" sz="800" dirty="0"/>
-                        <a:t>Eric? Ben</a:t>
+                        <a:t>Eric &amp; Ben</a:t>
                       </a:r>
                     </a:p>
                   </a:txBody>
@@ -8578,7 +8608,17 @@
                     <a:lstStyle/>
                     <a:p>
                       <a:pPr algn="ctr"/>
-                      <a:endParaRPr lang="en-NL" sz="800"/>
+                      <a:r>
+                        <a:rPr lang="en-NL" sz="800" dirty="0"/>
+                        <a:t>David Wroe?</a:t>
+                      </a:r>
+                    </a:p>
+                    <a:p>
+                      <a:pPr algn="ctr"/>
+                      <a:r>
+                        <a:rPr lang="en-NL" sz="800" dirty="0"/>
+                        <a:t>Ben send him a msg</a:t>
+                      </a:r>
                     </a:p>
                   </a:txBody>
                   <a:tcPr/>
@@ -8621,7 +8661,10 @@
                     <a:lstStyle/>
                     <a:p>
                       <a:pPr algn="ctr"/>
-                      <a:endParaRPr lang="en-NL" sz="800"/>
+                      <a:r>
+                        <a:rPr lang="en-NL" sz="800" dirty="0"/>
+                        <a:t>Proof of Concept Before EFI Prague</a:t>
+                      </a:r>
                     </a:p>
                   </a:txBody>
                   <a:tcPr/>
@@ -8645,8 +8688,34 @@
                     <a:bodyPr/>
                     <a:lstStyle/>
                     <a:p>
-                      <a:pPr algn="ctr"/>
-                      <a:endParaRPr lang="en-NL" sz="800" dirty="0"/>
+                      <a:pPr marL="171450" indent="-171450" algn="ctr">
+                        <a:buFont typeface="Arial" panose="020B0604020202020204" pitchFamily="34" charset="0"/>
+                        <a:buChar char="•"/>
+                      </a:pPr>
+                      <a:r>
+                        <a:rPr lang="en-NL" sz="800" dirty="0"/>
+                        <a:t>Eurotransplant – Come up with a use case for this (SOT)</a:t>
+                      </a:r>
+                    </a:p>
+                    <a:p>
+                      <a:pPr marL="171450" indent="-171450" algn="ctr">
+                        <a:buFont typeface="Arial" panose="020B0604020202020204" pitchFamily="34" charset="0"/>
+                        <a:buChar char="•"/>
+                      </a:pPr>
+                      <a:r>
+                        <a:rPr lang="en-NL" sz="800" dirty="0"/>
+                        <a:t>NMDP – Examle for a SCT</a:t>
+                      </a:r>
+                    </a:p>
+                    <a:p>
+                      <a:pPr marL="171450" indent="-171450" algn="ctr">
+                        <a:buFont typeface="Arial" panose="020B0604020202020204" pitchFamily="34" charset="0"/>
+                        <a:buChar char="•"/>
+                      </a:pPr>
+                      <a:r>
+                        <a:rPr lang="en-NL" sz="800" dirty="0"/>
+                        <a:t>Penn – AB data for SRTR outcomes, Tx that meet acceptable mismatches, DSA outcome</a:t>
+                      </a:r>
                     </a:p>
                   </a:txBody>
                   <a:tcPr/>
@@ -8678,7 +8747,10 @@
                     <a:lstStyle/>
                     <a:p>
                       <a:pPr algn="ctr"/>
-                      <a:endParaRPr lang="en-NL" sz="800" dirty="0"/>
+                      <a:r>
+                        <a:rPr lang="en-NL" sz="800" dirty="0"/>
+                        <a:t>Q3 2025</a:t>
+                      </a:r>
                     </a:p>
                   </a:txBody>
                   <a:tcPr/>
@@ -8738,7 +8810,7 @@
                       </a:pPr>
                       <a:r>
                         <a:rPr lang="en-GB" sz="800" dirty="0"/>
-                        <a:t>Vet with Users and manufacturers</a:t>
+                        <a:t>Vet with Users and Manufacturers / Vendors</a:t>
                       </a:r>
                     </a:p>
                     <a:p>
@@ -8754,7 +8826,17 @@
                     <a:lstStyle/>
                     <a:p>
                       <a:pPr algn="ctr"/>
-                      <a:endParaRPr lang="en-NL" sz="800"/>
+                      <a:r>
+                        <a:rPr lang="en-NL" sz="800" dirty="0"/>
+                        <a:t>Prague EFI May 12</a:t>
+                      </a:r>
+                    </a:p>
+                    <a:p>
+                      <a:pPr algn="ctr"/>
+                      <a:r>
+                        <a:rPr lang="en-NL" sz="800" dirty="0"/>
+                        <a:t>DASH 17 Prague</a:t>
+                      </a:r>
                     </a:p>
                   </a:txBody>
                   <a:tcPr/>
@@ -8765,7 +8847,7 @@
                     <a:lstStyle/>
                     <a:p>
                       <a:pPr algn="ctr"/>
-                      <a:endParaRPr lang="en-NL" sz="800"/>
+                      <a:endParaRPr lang="en-NL" sz="800" dirty="0"/>
                     </a:p>
                   </a:txBody>
                   <a:tcPr/>
@@ -8984,7 +9066,10 @@
                     <a:lstStyle/>
                     <a:p>
                       <a:pPr algn="ctr"/>
-                      <a:endParaRPr lang="en-NL" sz="800" dirty="0"/>
+                      <a:r>
+                        <a:rPr lang="en-NL" sz="800" dirty="0"/>
+                        <a:t>David Wroe?</a:t>
+                      </a:r>
                     </a:p>
                   </a:txBody>
                   <a:tcPr/>
@@ -9121,7 +9206,7 @@
                     <a:lstStyle/>
                     <a:p>
                       <a:pPr algn="ctr"/>
-                      <a:endParaRPr lang="en-NL" sz="800"/>
+                      <a:endParaRPr lang="en-NL" sz="800" dirty="0"/>
                     </a:p>
                   </a:txBody>
                   <a:tcPr/>
@@ -9259,6 +9344,20 @@
             <a:r>
               <a:rPr lang="en-NL" dirty="0"/>
               <a:t>Ben = Remote / Online</a:t>
+            </a:r>
+          </a:p>
+          <a:p>
+            <a:pPr lvl="1"/>
+            <a:r>
+              <a:rPr lang="en-NL" dirty="0"/>
+              <a:t>Nick also remote</a:t>
+            </a:r>
+          </a:p>
+          <a:p>
+            <a:pPr lvl="1"/>
+            <a:r>
+              <a:rPr lang="en-NL" dirty="0"/>
+              <a:t>Kazu &amp; Loren &amp; Martin in person</a:t>
             </a:r>
           </a:p>
         </p:txBody>
